--- a/History/Правление Ярослава Мудрого.pptx
+++ b/History/Правление Ярослава Мудрого.pptx
@@ -131,6 +131,9 @@
         </p14:section>
       </p14:sectionLst>
     </p:ext>
+    <p:ext uri="{EFAFB233-063F-42B5-8137-9DF3F51BA10A}">
+      <p15:sldGuideLst xmlns:p15="http://schemas.microsoft.com/office/powerpoint/2012/main"/>
+    </p:ext>
   </p:extLst>
 </p:presentation>
 </file>
@@ -229,7 +232,7 @@
           <a:p>
             <a:fld id="{28C7D475-9C67-480E-BC26-B59BDEE70B4B}" type="datetimeFigureOut">
               <a:rPr lang="ru-RU" smtClean="0"/>
-              <a:t>22.03.2026</a:t>
+              <a:t>30.04.2026</a:t>
             </a:fld>
             <a:endParaRPr lang="ru-RU"/>
           </a:p>
@@ -776,7 +779,7 @@
             <a:fld id="{B61BEF0D-F0BB-DE4B-95CE-6DB70DBA9567}" type="datetimeFigureOut">
               <a:rPr lang="en-US" dirty="0"/>
               <a:pPr/>
-              <a:t>3/22/2026</a:t>
+              <a:t>4/30/2026</a:t>
             </a:fld>
             <a:endParaRPr lang="en-US" dirty="0"/>
           </a:p>
@@ -1118,7 +1121,7 @@
             <a:fld id="{B61BEF0D-F0BB-DE4B-95CE-6DB70DBA9567}" type="datetimeFigureOut">
               <a:rPr lang="en-US" dirty="0"/>
               <a:pPr/>
-              <a:t>3/22/2026</a:t>
+              <a:t>4/30/2026</a:t>
             </a:fld>
             <a:endParaRPr lang="en-US" dirty="0"/>
           </a:p>
@@ -1523,7 +1526,7 @@
             <a:fld id="{B61BEF0D-F0BB-DE4B-95CE-6DB70DBA9567}" type="datetimeFigureOut">
               <a:rPr lang="en-US" dirty="0"/>
               <a:pPr/>
-              <a:t>3/22/2026</a:t>
+              <a:t>4/30/2026</a:t>
             </a:fld>
             <a:endParaRPr lang="en-US" dirty="0"/>
           </a:p>
@@ -1862,7 +1865,7 @@
             <a:fld id="{B61BEF0D-F0BB-DE4B-95CE-6DB70DBA9567}" type="datetimeFigureOut">
               <a:rPr lang="en-US" dirty="0"/>
               <a:pPr/>
-              <a:t>3/22/2026</a:t>
+              <a:t>4/30/2026</a:t>
             </a:fld>
             <a:endParaRPr lang="en-US" dirty="0"/>
           </a:p>
@@ -2186,7 +2189,7 @@
             <a:fld id="{B61BEF0D-F0BB-DE4B-95CE-6DB70DBA9567}" type="datetimeFigureOut">
               <a:rPr lang="en-US" dirty="0"/>
               <a:pPr/>
-              <a:t>3/22/2026</a:t>
+              <a:t>4/30/2026</a:t>
             </a:fld>
             <a:endParaRPr lang="en-US" dirty="0"/>
           </a:p>
@@ -2586,7 +2589,7 @@
             <a:fld id="{B61BEF0D-F0BB-DE4B-95CE-6DB70DBA9567}" type="datetimeFigureOut">
               <a:rPr lang="en-US" dirty="0"/>
               <a:pPr/>
-              <a:t>3/22/2026</a:t>
+              <a:t>4/30/2026</a:t>
             </a:fld>
             <a:endParaRPr lang="en-US" dirty="0"/>
           </a:p>
@@ -2847,7 +2850,7 @@
             <a:fld id="{B61BEF0D-F0BB-DE4B-95CE-6DB70DBA9567}" type="datetimeFigureOut">
               <a:rPr lang="en-US" dirty="0"/>
               <a:pPr/>
-              <a:t>3/22/2026</a:t>
+              <a:t>4/30/2026</a:t>
             </a:fld>
             <a:endParaRPr lang="en-US" dirty="0"/>
           </a:p>
@@ -3113,7 +3116,7 @@
             <a:fld id="{B61BEF0D-F0BB-DE4B-95CE-6DB70DBA9567}" type="datetimeFigureOut">
               <a:rPr lang="en-US" dirty="0"/>
               <a:pPr/>
-              <a:t>3/22/2026</a:t>
+              <a:t>4/30/2026</a:t>
             </a:fld>
             <a:endParaRPr lang="en-US" dirty="0"/>
           </a:p>
@@ -3379,7 +3382,7 @@
             <a:fld id="{B61BEF0D-F0BB-DE4B-95CE-6DB70DBA9567}" type="datetimeFigureOut">
               <a:rPr lang="en-US" dirty="0"/>
               <a:pPr/>
-              <a:t>3/22/2026</a:t>
+              <a:t>4/30/2026</a:t>
             </a:fld>
             <a:endParaRPr lang="en-US" dirty="0"/>
           </a:p>
@@ -3712,7 +3715,7 @@
             <a:fld id="{B61BEF0D-F0BB-DE4B-95CE-6DB70DBA9567}" type="datetimeFigureOut">
               <a:rPr lang="en-US" dirty="0"/>
               <a:pPr/>
-              <a:t>3/22/2026</a:t>
+              <a:t>4/30/2026</a:t>
             </a:fld>
             <a:endParaRPr lang="en-US" dirty="0"/>
           </a:p>
@@ -4039,7 +4042,7 @@
             <a:fld id="{B61BEF0D-F0BB-DE4B-95CE-6DB70DBA9567}" type="datetimeFigureOut">
               <a:rPr lang="en-US" dirty="0"/>
               <a:pPr/>
-              <a:t>3/22/2026</a:t>
+              <a:t>4/30/2026</a:t>
             </a:fld>
             <a:endParaRPr lang="en-US" dirty="0"/>
           </a:p>
@@ -4500,7 +4503,7 @@
             <a:fld id="{B61BEF0D-F0BB-DE4B-95CE-6DB70DBA9567}" type="datetimeFigureOut">
               <a:rPr lang="en-US" dirty="0"/>
               <a:pPr/>
-              <a:t>3/22/2026</a:t>
+              <a:t>4/30/2026</a:t>
             </a:fld>
             <a:endParaRPr lang="en-US" dirty="0"/>
           </a:p>
@@ -4709,7 +4712,7 @@
             <a:fld id="{B61BEF0D-F0BB-DE4B-95CE-6DB70DBA9567}" type="datetimeFigureOut">
               <a:rPr lang="en-US" dirty="0"/>
               <a:pPr/>
-              <a:t>3/22/2026</a:t>
+              <a:t>4/30/2026</a:t>
             </a:fld>
             <a:endParaRPr lang="en-US" dirty="0"/>
           </a:p>
@@ -4890,7 +4893,7 @@
             <a:fld id="{B61BEF0D-F0BB-DE4B-95CE-6DB70DBA9567}" type="datetimeFigureOut">
               <a:rPr lang="en-US" dirty="0"/>
               <a:pPr/>
-              <a:t>3/22/2026</a:t>
+              <a:t>4/30/2026</a:t>
             </a:fld>
             <a:endParaRPr lang="en-US" dirty="0"/>
           </a:p>
@@ -5227,7 +5230,7 @@
             <a:fld id="{B61BEF0D-F0BB-DE4B-95CE-6DB70DBA9567}" type="datetimeFigureOut">
               <a:rPr lang="en-US" dirty="0"/>
               <a:pPr/>
-              <a:t>3/22/2026</a:t>
+              <a:t>4/30/2026</a:t>
             </a:fld>
             <a:endParaRPr lang="en-US" dirty="0"/>
           </a:p>
@@ -5576,7 +5579,7 @@
             <a:fld id="{B61BEF0D-F0BB-DE4B-95CE-6DB70DBA9567}" type="datetimeFigureOut">
               <a:rPr lang="en-US" dirty="0"/>
               <a:pPr/>
-              <a:t>3/22/2026</a:t>
+              <a:t>4/30/2026</a:t>
             </a:fld>
             <a:endParaRPr lang="en-US" dirty="0"/>
           </a:p>
@@ -7872,7 +7875,7 @@
             <a:fld id="{B61BEF0D-F0BB-DE4B-95CE-6DB70DBA9567}" type="datetimeFigureOut">
               <a:rPr lang="en-US" dirty="0"/>
               <a:pPr/>
-              <a:t>3/22/2026</a:t>
+              <a:t>4/30/2026</a:t>
             </a:fld>
             <a:endParaRPr lang="en-US" dirty="0"/>
           </a:p>
